--- a/prezentaciya-den-1/Den-1-Cifrovoy-sotrudnik.pptx
+++ b/prezentaciya-den-1/Den-1-Cifrovoy-sotrudnik.pptx
@@ -13791,7 +13791,7 @@
               <a:buNone/>
             </a:pPr>
             <a:r>
-              <a:rPr lang="en-US" sz="12000" b="1" dirty="0">
+              <a:rPr lang="en-US" sz="8400" b="1" dirty="0">
                 <a:solidFill>
                   <a:srgbClr val="FF7A3D"/>
                 </a:solidFill>
@@ -13801,7 +13801,7 @@
               </a:rPr>
               <a:t>60 секунд</a:t>
             </a:r>
-            <a:endParaRPr lang="en-US" sz="12000" dirty="0"/>
+            <a:endParaRPr lang="en-US" sz="8400" dirty="0"/>
           </a:p>
         </p:txBody>
       </p:sp>
